--- a/examples/repositories/sebastian-205/deck.pptx
+++ b/examples/repositories/sebastian-205/deck.pptx
@@ -512,6 +512,21 @@
               <a:t>入力§1。架空・未実施のデザイン研究計画。廃棄原因全体ではなく、何があるか分からない情報の問題に絞る。図は入力記述に基づく説明図。</a:t>
             </a:r>
           </a:p>
+          <a:p>
+            <a:r>
+              <a:t>主張: 家庭内在庫を一覧にするUIを提案し、「何があるか分からない」問題に対象を絞る。</a:t>
+            </a:r>
+          </a:p>
+          <a:p>
+            <a:r>
+              <a:t>出典: input/BRIEF.md §1</a:t>
+            </a:r>
+          </a:p>
+          <a:p>
+            <a:r>
+              <a:t>資料の限界: 廃棄原因全体を解決する提案ではなく、食品ロス削減効果は未検証。</a:t>
+            </a:r>
+          </a:p>
         </p:txBody>
       </p:sp>
       <p:sp>
@@ -582,6 +597,21 @@
               <a:t>入力§2。研究の問いと三つの利用場面。毎回アプリを開く前提は未検証。見る価値が生じる場面を確かめる。</a:t>
             </a:r>
           </a:p>
+          <a:p>
+            <a:r>
+              <a:t>主張: 買い物前・調理前・片づけ時の三場面で、表示が判断に使えるかを確かめる。</a:t>
+            </a:r>
+          </a:p>
+          <a:p>
+            <a:r>
+              <a:t>出典: input/BRIEF.md §2</a:t>
+            </a:r>
+          </a:p>
+          <a:p>
+            <a:r>
+              <a:t>資料の限界: 毎回アプリを開く価値があるかは確認していない。</a:t>
+            </a:r>
+          </a:p>
         </p:txBody>
       </p:sp>
       <p:sp>
@@ -652,6 +682,21 @@
               <a:t>入力§3。仮説Aは保存場所の一覧、仮説Bは粗い残量段階。記録精度と更新負担のトレードオフであり、優劣の結果ではない。</a:t>
             </a:r>
           </a:p>
+          <a:p>
+            <a:r>
+              <a:t>主張: 場所別一覧と大まかな残量は、探しやすさと更新負担についての二つの仮説である。</a:t>
+            </a:r>
+          </a:p>
+          <a:p>
+            <a:r>
+              <a:t>出典: input/BRIEF.md §3</a:t>
+            </a:r>
+          </a:p>
+          <a:p>
+            <a:r>
+              <a:t>資料の限界: 更新が続くという結果ではない。継続と正確さの両方を評価する計画。</a:t>
+            </a:r>
+          </a:p>
         </p:txBody>
       </p:sp>
       <p:sp>
@@ -722,6 +767,21 @@
               <a:t>入力§4。提案UIは説明用の架空表示。食品名・残量・更新時点・包装表示からの期限転記を区別。期限未登録は期限がないことを意味しない。安全を保証しない。</a:t>
             </a:r>
           </a:p>
+          <a:p>
+            <a:r>
+              <a:t>主張: 提案UIでは、残量・更新時点・包装表示から転記する期限を分け、不明を隠さない。</a:t>
+            </a:r>
+          </a:p>
+          <a:p>
+            <a:r>
+              <a:t>出典: input/BRIEF.md §4</a:t>
+            </a:r>
+          </a:p>
+          <a:p>
+            <a:r>
+              <a:t>資料の限界: 表示例は架空。「未登録」は期限なしを意味せず、安全を保証しない。</a:t>
+            </a:r>
+          </a:p>
         </p:txBody>
       </p:sp>
       <p:sp>
@@ -792,6 +852,21 @@
               <a:t>入力§5。選択→残量変更→保存場所確認の提案。使い切りを取り消せる設計を検討。家族の共有は同意・権限を要し、自動的には許可されない。</a:t>
             </a:r>
           </a:p>
+          <a:p>
+            <a:r>
+              <a:t>主張: 選択→残量変更→保存場所確認の操作案に、取り消しと共有時の同意・権限を検討する。</a:t>
+            </a:r>
+          </a:p>
+          <a:p>
+            <a:r>
+              <a:t>出典: input/BRIEF.md §5</a:t>
+            </a:r>
+          </a:p>
+          <a:p>
+            <a:r>
+              <a:t>資料の限界: 操作の短さや共有設計の有効性を利用者で評価していない。</a:t>
+            </a:r>
+          </a:p>
         </p:txBody>
       </p:sp>
       <p:sp>
@@ -862,6 +937,21 @@
               <a:t>入力§6。紙試作→操作可能な試作の計画。課題、観察、操作記録、振り返りを組み合わせる。数値・結果なし。家庭で継続評価する場合はデータ最小化と参加・共有の別の同意が必要。</a:t>
             </a:r>
           </a:p>
+          <a:p>
+            <a:r>
+              <a:t>主張: 三課題を、観察・操作記録・振り返りで評価する計画である。</a:t>
+            </a:r>
+          </a:p>
+          <a:p>
+            <a:r>
+              <a:t>出典: input/BRIEF.md §6</a:t>
+            </a:r>
+          </a:p>
+          <a:p>
+            <a:r>
+              <a:t>資料の限界: 観察人数・実測値・評価結果はない。継続評価ではデータ最小化と別の同意が必要。</a:t>
+            </a:r>
+          </a:p>
         </p:txBody>
       </p:sp>
       <p:sp>
@@ -932,6 +1022,21 @@
               <a:t>入力§7。未入力・更新忘れ・家族の利用でずれる。UIだけで食品ロス削減の証明はできない。期限表示は安全保証ではなく、実物と包装表示を確認する。</a:t>
             </a:r>
           </a:p>
+          <a:p>
+            <a:r>
+              <a:t>主張: 未入力・更新忘れ・家族の利用により、画面の在庫と実物はずれうる。</a:t>
+            </a:r>
+          </a:p>
+          <a:p>
+            <a:r>
+              <a:t>出典: input/BRIEF.md §7</a:t>
+            </a:r>
+          </a:p>
+          <a:p>
+            <a:r>
+              <a:t>資料の限界: UIだけで食品ロス削減を証明できず、可食判断を自動化しない。</a:t>
+            </a:r>
+          </a:p>
         </p:txBody>
       </p:sp>
       <p:sp>
@@ -1000,6 +1105,21 @@
           <a:p>
             <a:r>
               <a:t>入力§8。未実施研究計画の次の一歩。棚を決める→試作→課題→修正。通知やレシピを最初から増やさず、基本一覧と更新が判断に使えるかを検証する。</a:t>
+            </a:r>
+          </a:p>
+          <a:p>
+            <a:r>
+              <a:t>主張: まず一つの棚を想定した試作で、一覧と更新が判断に使えるかを確かめる。</a:t>
+            </a:r>
+          </a:p>
+          <a:p>
+            <a:r>
+              <a:t>出典: input/BRIEF.md §8</a:t>
+            </a:r>
+          </a:p>
+          <a:p>
+            <a:r>
+              <a:t>資料の限界: 試作も利用者による検証も未実施。</a:t>
             </a:r>
           </a:p>
         </p:txBody>
@@ -4078,7 +4198,7 @@
               <a:spcAft>
                 <a:spcPts val="800"/>
               </a:spcAft>
-              <a:defRPr sz="1000" b="0">
+              <a:defRPr sz="1100" b="0">
                 <a:solidFill>
                   <a:srgbClr val="E8F0E9"/>
                 </a:solidFill>
@@ -4086,7 +4206,7 @@
               </a:defRPr>
             </a:pPr>
             <a:r>
-              <a:t>出典：架空の研究ノート  |  未実施・実測結果なし  |  入力 BRIEF / data.json</a:t>
+              <a:t>出典：BRIEF §1  |  架空・未実施の研究計画  |  実測結果なし</a:t>
             </a:r>
           </a:p>
         </p:txBody>
@@ -4674,8 +4794,8 @@
         </p:nvSpPr>
         <p:spPr>
           <a:xfrm>
-            <a:off x="7955279" y="5760720"/>
-            <a:ext cx="3200400" cy="365760"/>
+            <a:off x="7955279" y="5943600"/>
+            <a:ext cx="3200400" cy="274320"/>
           </a:xfrm>
           <a:prstGeom prst="rect">
             <a:avLst/>
@@ -4692,7 +4812,7 @@
               <a:spcAft>
                 <a:spcPts val="800"/>
               </a:spcAft>
-              <a:defRPr sz="1800" b="0">
+              <a:defRPr sz="1700" b="0">
                 <a:solidFill>
                   <a:srgbClr val="FAFCF7"/>
                 </a:solidFill>
@@ -4835,7 +4955,7 @@
               <a:spcAft>
                 <a:spcPts val="800"/>
               </a:spcAft>
-              <a:defRPr sz="1000" b="0">
+              <a:defRPr sz="1100" b="0">
                 <a:solidFill>
                   <a:srgbClr val="526D63"/>
                 </a:solidFill>
@@ -4843,7 +4963,7 @@
               </a:defRPr>
             </a:pPr>
             <a:r>
-              <a:t>出典：架空の研究ノート  |  未実施・実測結果なし  |  入力 BRIEF / data.json</a:t>
+              <a:t>出典：BRIEF §2  |  架空・未実施の研究計画  |  実測結果なし</a:t>
             </a:r>
           </a:p>
         </p:txBody>
@@ -5618,7 +5738,7 @@
               <a:spcAft>
                 <a:spcPts val="800"/>
               </a:spcAft>
-              <a:defRPr sz="1000" b="0">
+              <a:defRPr sz="1100" b="0">
                 <a:solidFill>
                   <a:srgbClr val="526D63"/>
                 </a:solidFill>
@@ -5626,7 +5746,7 @@
               </a:defRPr>
             </a:pPr>
             <a:r>
-              <a:t>出典：架空の研究ノート  |  未実施・実測結果なし  |  入力 BRIEF / data.json</a:t>
+              <a:t>出典：BRIEF §3  |  架空・未実施の研究計画  |  実測結果なし</a:t>
             </a:r>
           </a:p>
         </p:txBody>
@@ -6441,7 +6561,7 @@
               <a:spcAft>
                 <a:spcPts val="800"/>
               </a:spcAft>
-              <a:defRPr sz="1000" b="0">
+              <a:defRPr sz="1100" b="0">
                 <a:solidFill>
                   <a:srgbClr val="526D63"/>
                 </a:solidFill>
@@ -6449,7 +6569,7 @@
               </a:defRPr>
             </a:pPr>
             <a:r>
-              <a:t>出典：架空の研究ノート  |  未実施・実測結果なし  |  入力 BRIEF / data.json</a:t>
+              <a:t>出典：BRIEF §4  |  架空・未実施の研究計画  |  実測結果なし</a:t>
             </a:r>
           </a:p>
         </p:txBody>
@@ -7393,7 +7513,7 @@
               <a:spcAft>
                 <a:spcPts val="800"/>
               </a:spcAft>
-              <a:defRPr sz="1000" b="0">
+              <a:defRPr sz="1100" b="0">
                 <a:solidFill>
                   <a:srgbClr val="526D63"/>
                 </a:solidFill>
@@ -7401,7 +7521,7 @@
               </a:defRPr>
             </a:pPr>
             <a:r>
-              <a:t>出典：架空の研究ノート  |  未実施・実測結果なし  |  入力 BRIEF / data.json</a:t>
+              <a:t>出典：BRIEF §5  |  架空・未実施の研究計画  |  実測結果なし</a:t>
             </a:r>
           </a:p>
         </p:txBody>
@@ -8340,7 +8460,7 @@
               <a:spcAft>
                 <a:spcPts val="800"/>
               </a:spcAft>
-              <a:defRPr sz="1000" b="0">
+              <a:defRPr sz="1100" b="0">
                 <a:solidFill>
                   <a:srgbClr val="526D63"/>
                 </a:solidFill>
@@ -8348,7 +8468,7 @@
               </a:defRPr>
             </a:pPr>
             <a:r>
-              <a:t>出典：架空の研究ノート  |  未実施・実測結果なし  |  入力 BRIEF / data.json</a:t>
+              <a:t>出典：BRIEF §6  |  架空・未実施の研究計画  |  実測結果なし</a:t>
             </a:r>
           </a:p>
         </p:txBody>
@@ -9584,7 +9704,7 @@
               <a:spcAft>
                 <a:spcPts val="800"/>
               </a:spcAft>
-              <a:defRPr sz="1000" b="0">
+              <a:defRPr sz="1100" b="0">
                 <a:solidFill>
                   <a:srgbClr val="E8F0E9"/>
                 </a:solidFill>
@@ -9592,7 +9712,7 @@
               </a:defRPr>
             </a:pPr>
             <a:r>
-              <a:t>出典：架空の研究ノート  |  未実施・実測結果なし  |  入力 BRIEF / data.json</a:t>
+              <a:t>出典：BRIEF §7  |  架空・未実施の研究計画  |  実測結果なし</a:t>
             </a:r>
           </a:p>
         </p:txBody>
@@ -10364,7 +10484,7 @@
               <a:spcAft>
                 <a:spcPts val="800"/>
               </a:spcAft>
-              <a:defRPr sz="1000" b="0">
+              <a:defRPr sz="1100" b="0">
                 <a:solidFill>
                   <a:srgbClr val="526D63"/>
                 </a:solidFill>
@@ -10372,7 +10492,7 @@
               </a:defRPr>
             </a:pPr>
             <a:r>
-              <a:t>出典：架空の研究ノート  |  未実施・実測結果なし  |  入力 BRIEF / data.json</a:t>
+              <a:t>出典：BRIEF §8  |  架空・未実施の研究計画  |  実測結果なし</a:t>
             </a:r>
           </a:p>
         </p:txBody>
